--- a/Beyond the Degree.pptx
+++ b/Beyond the Degree.pptx
@@ -7,18 +7,19 @@
   <p:sldIdLst>
     <p:sldId id="256" r:id="rId2"/>
     <p:sldId id="257" r:id="rId3"/>
-    <p:sldId id="258" r:id="rId4"/>
-    <p:sldId id="266" r:id="rId5"/>
-    <p:sldId id="264" r:id="rId6"/>
-    <p:sldId id="262" r:id="rId7"/>
-    <p:sldId id="259" r:id="rId8"/>
-    <p:sldId id="265" r:id="rId9"/>
-    <p:sldId id="263" r:id="rId10"/>
-    <p:sldId id="260" r:id="rId11"/>
-    <p:sldId id="261" r:id="rId12"/>
-    <p:sldId id="267" r:id="rId13"/>
-    <p:sldId id="268" r:id="rId14"/>
-    <p:sldId id="269" r:id="rId15"/>
+    <p:sldId id="270" r:id="rId4"/>
+    <p:sldId id="258" r:id="rId5"/>
+    <p:sldId id="266" r:id="rId6"/>
+    <p:sldId id="264" r:id="rId7"/>
+    <p:sldId id="262" r:id="rId8"/>
+    <p:sldId id="259" r:id="rId9"/>
+    <p:sldId id="265" r:id="rId10"/>
+    <p:sldId id="263" r:id="rId11"/>
+    <p:sldId id="260" r:id="rId12"/>
+    <p:sldId id="261" r:id="rId13"/>
+    <p:sldId id="267" r:id="rId14"/>
+    <p:sldId id="268" r:id="rId15"/>
+    <p:sldId id="269" r:id="rId16"/>
   </p:sldIdLst>
   <p:sldSz cx="12192000" cy="6858000"/>
   <p:notesSz cx="6858000" cy="9144000"/>
@@ -258,7 +259,7 @@
           <a:p>
             <a:fld id="{11CCA1F6-CB27-480F-9045-D7C05230D3A4}" type="datetimeFigureOut">
               <a:rPr lang="en-US" smtClean="0"/>
-              <a:t>2/25/2026</a:t>
+              <a:t>2/26/2026</a:t>
             </a:fld>
             <a:endParaRPr lang="en-US"/>
           </a:p>
@@ -545,7 +546,7 @@
           <a:p>
             <a:fld id="{11CCA1F6-CB27-480F-9045-D7C05230D3A4}" type="datetimeFigureOut">
               <a:rPr lang="en-US" smtClean="0"/>
-              <a:t>2/25/2026</a:t>
+              <a:t>2/26/2026</a:t>
             </a:fld>
             <a:endParaRPr lang="en-US"/>
           </a:p>
@@ -737,7 +738,7 @@
           <a:p>
             <a:fld id="{11CCA1F6-CB27-480F-9045-D7C05230D3A4}" type="datetimeFigureOut">
               <a:rPr lang="en-US" smtClean="0"/>
-              <a:t>2/25/2026</a:t>
+              <a:t>2/26/2026</a:t>
             </a:fld>
             <a:endParaRPr lang="en-US"/>
           </a:p>
@@ -998,7 +999,7 @@
           <a:p>
             <a:fld id="{11CCA1F6-CB27-480F-9045-D7C05230D3A4}" type="datetimeFigureOut">
               <a:rPr lang="en-US" smtClean="0"/>
-              <a:t>2/25/2026</a:t>
+              <a:t>2/26/2026</a:t>
             </a:fld>
             <a:endParaRPr lang="en-US"/>
           </a:p>
@@ -1422,7 +1423,7 @@
           <a:p>
             <a:fld id="{11CCA1F6-CB27-480F-9045-D7C05230D3A4}" type="datetimeFigureOut">
               <a:rPr lang="en-US" smtClean="0"/>
-              <a:t>2/25/2026</a:t>
+              <a:t>2/26/2026</a:t>
             </a:fld>
             <a:endParaRPr lang="en-US"/>
           </a:p>
@@ -1968,7 +1969,7 @@
           <a:p>
             <a:fld id="{11CCA1F6-CB27-480F-9045-D7C05230D3A4}" type="datetimeFigureOut">
               <a:rPr lang="en-US" smtClean="0"/>
-              <a:t>2/25/2026</a:t>
+              <a:t>2/26/2026</a:t>
             </a:fld>
             <a:endParaRPr lang="en-US"/>
           </a:p>
@@ -2808,7 +2809,7 @@
           <a:p>
             <a:fld id="{11CCA1F6-CB27-480F-9045-D7C05230D3A4}" type="datetimeFigureOut">
               <a:rPr lang="en-US" smtClean="0"/>
-              <a:t>2/25/2026</a:t>
+              <a:t>2/26/2026</a:t>
             </a:fld>
             <a:endParaRPr lang="en-US"/>
           </a:p>
@@ -2978,7 +2979,7 @@
           <a:p>
             <a:fld id="{11CCA1F6-CB27-480F-9045-D7C05230D3A4}" type="datetimeFigureOut">
               <a:rPr lang="en-US" smtClean="0"/>
-              <a:t>2/25/2026</a:t>
+              <a:t>2/26/2026</a:t>
             </a:fld>
             <a:endParaRPr lang="en-US"/>
           </a:p>
@@ -3162,7 +3163,7 @@
           <a:p>
             <a:fld id="{11CCA1F6-CB27-480F-9045-D7C05230D3A4}" type="datetimeFigureOut">
               <a:rPr lang="en-US" smtClean="0"/>
-              <a:t>2/25/2026</a:t>
+              <a:t>2/26/2026</a:t>
             </a:fld>
             <a:endParaRPr lang="en-US"/>
           </a:p>
@@ -3332,7 +3333,7 @@
           <a:p>
             <a:fld id="{11CCA1F6-CB27-480F-9045-D7C05230D3A4}" type="datetimeFigureOut">
               <a:rPr lang="en-US" smtClean="0"/>
-              <a:t>2/25/2026</a:t>
+              <a:t>2/26/2026</a:t>
             </a:fld>
             <a:endParaRPr lang="en-US"/>
           </a:p>
@@ -3580,7 +3581,7 @@
           <a:p>
             <a:fld id="{11CCA1F6-CB27-480F-9045-D7C05230D3A4}" type="datetimeFigureOut">
               <a:rPr lang="en-US" smtClean="0"/>
-              <a:t>2/25/2026</a:t>
+              <a:t>2/26/2026</a:t>
             </a:fld>
             <a:endParaRPr lang="en-US"/>
           </a:p>
@@ -3817,7 +3818,7 @@
           <a:p>
             <a:fld id="{11CCA1F6-CB27-480F-9045-D7C05230D3A4}" type="datetimeFigureOut">
               <a:rPr lang="en-US" smtClean="0"/>
-              <a:t>2/25/2026</a:t>
+              <a:t>2/26/2026</a:t>
             </a:fld>
             <a:endParaRPr lang="en-US"/>
           </a:p>
@@ -4190,7 +4191,7 @@
           <a:p>
             <a:fld id="{11CCA1F6-CB27-480F-9045-D7C05230D3A4}" type="datetimeFigureOut">
               <a:rPr lang="en-US" smtClean="0"/>
-              <a:t>2/25/2026</a:t>
+              <a:t>2/26/2026</a:t>
             </a:fld>
             <a:endParaRPr lang="en-US"/>
           </a:p>
@@ -4308,7 +4309,7 @@
           <a:p>
             <a:fld id="{11CCA1F6-CB27-480F-9045-D7C05230D3A4}" type="datetimeFigureOut">
               <a:rPr lang="en-US" smtClean="0"/>
-              <a:t>2/25/2026</a:t>
+              <a:t>2/26/2026</a:t>
             </a:fld>
             <a:endParaRPr lang="en-US"/>
           </a:p>
@@ -4403,7 +4404,7 @@
           <a:p>
             <a:fld id="{11CCA1F6-CB27-480F-9045-D7C05230D3A4}" type="datetimeFigureOut">
               <a:rPr lang="en-US" smtClean="0"/>
-              <a:t>2/25/2026</a:t>
+              <a:t>2/26/2026</a:t>
             </a:fld>
             <a:endParaRPr lang="en-US"/>
           </a:p>
@@ -4654,7 +4655,7 @@
           <a:p>
             <a:fld id="{11CCA1F6-CB27-480F-9045-D7C05230D3A4}" type="datetimeFigureOut">
               <a:rPr lang="en-US" smtClean="0"/>
-              <a:t>2/25/2026</a:t>
+              <a:t>2/26/2026</a:t>
             </a:fld>
             <a:endParaRPr lang="en-US"/>
           </a:p>
@@ -4941,7 +4942,7 @@
           <a:p>
             <a:fld id="{11CCA1F6-CB27-480F-9045-D7C05230D3A4}" type="datetimeFigureOut">
               <a:rPr lang="en-US" smtClean="0"/>
-              <a:t>2/25/2026</a:t>
+              <a:t>2/26/2026</a:t>
             </a:fld>
             <a:endParaRPr lang="en-US"/>
           </a:p>
@@ -5154,7 +5155,7 @@
           <a:p>
             <a:fld id="{11CCA1F6-CB27-480F-9045-D7C05230D3A4}" type="datetimeFigureOut">
               <a:rPr lang="en-US" smtClean="0"/>
-              <a:t>2/25/2026</a:t>
+              <a:t>2/26/2026</a:t>
             </a:fld>
             <a:endParaRPr lang="en-US"/>
           </a:p>
@@ -5783,7 +5784,7 @@
           <p:cNvPr id="2" name="Title 1">
             <a:extLst>
               <a:ext uri="{FF2B5EF4-FFF2-40B4-BE49-F238E27FC236}">
-                <a16:creationId xmlns:a16="http://schemas.microsoft.com/office/drawing/2014/main" id="{9085CC30-7490-4A0F-8AAC-5B6BC73758E0}"/>
+                <a16:creationId xmlns:a16="http://schemas.microsoft.com/office/drawing/2014/main" id="{A2FFA0D1-BCEB-4ACA-BB8D-95E3D3E2B8CE}"/>
               </a:ext>
             </a:extLst>
           </p:cNvPr>
@@ -5801,7 +5802,7 @@
           <a:p>
             <a:r>
               <a:rPr lang="en-US" dirty="0"/>
-              <a:t>Summing up your work: Portfolios</a:t>
+              <a:t>More formal approaches</a:t>
             </a:r>
           </a:p>
         </p:txBody>
@@ -5811,7 +5812,7 @@
           <p:cNvPr id="3" name="Content Placeholder 2">
             <a:extLst>
               <a:ext uri="{FF2B5EF4-FFF2-40B4-BE49-F238E27FC236}">
-                <a16:creationId xmlns:a16="http://schemas.microsoft.com/office/drawing/2014/main" id="{01926D69-C315-428F-A6BF-68732A1FDECB}"/>
+                <a16:creationId xmlns:a16="http://schemas.microsoft.com/office/drawing/2014/main" id="{4D9A0A03-C9D8-4ED1-983E-6818E1E7B53B}"/>
               </a:ext>
             </a:extLst>
           </p:cNvPr>
@@ -5829,26 +5830,23 @@
           <a:p>
             <a:r>
               <a:rPr lang="en-US" dirty="0"/>
-              <a:t>Work backwards: Aim to have solid work</a:t>
-            </a:r>
-            <a:br>
-              <a:rPr lang="en-US" dirty="0"/>
-            </a:br>
-            <a:r>
-              <a:rPr lang="en-US" dirty="0"/>
-              <a:t>Class projects, formal capstone, other work?</a:t>
-            </a:r>
-          </a:p>
-          <a:p>
-            <a:r>
-              <a:rPr lang="en-US" dirty="0"/>
-              <a:t>Have a way to compile it and to showcase it</a:t>
-            </a:r>
-          </a:p>
-          <a:p>
-            <a:r>
-              <a:rPr lang="en-US" dirty="0"/>
-              <a:t>Build a website?</a:t>
+              <a:t>Themed groupings (unofficial, up to you to explain)</a:t>
+            </a:r>
+          </a:p>
+          <a:p>
+            <a:r>
+              <a:rPr lang="en-US" dirty="0" err="1"/>
+              <a:t>Microcredentials</a:t>
+            </a:r>
+            <a:r>
+              <a:rPr lang="en-US" dirty="0"/>
+              <a:t> (a growing trend-will be official on transcripts)</a:t>
+            </a:r>
+          </a:p>
+          <a:p>
+            <a:r>
+              <a:rPr lang="en-US" dirty="0"/>
+              <a:t>Minors (official designations; on transcripts; build skills and send signals)</a:t>
             </a:r>
           </a:p>
         </p:txBody>
@@ -5856,7 +5854,7 @@
     </p:spTree>
     <p:extLst>
       <p:ext uri="{BB962C8B-B14F-4D97-AF65-F5344CB8AC3E}">
-        <p14:creationId xmlns:p14="http://schemas.microsoft.com/office/powerpoint/2010/main" val="803023614"/>
+        <p14:creationId xmlns:p14="http://schemas.microsoft.com/office/powerpoint/2010/main" val="1361017024"/>
       </p:ext>
     </p:extLst>
   </p:cSld>
@@ -5888,7 +5886,7 @@
           <p:cNvPr id="2" name="Title 1">
             <a:extLst>
               <a:ext uri="{FF2B5EF4-FFF2-40B4-BE49-F238E27FC236}">
-                <a16:creationId xmlns:a16="http://schemas.microsoft.com/office/drawing/2014/main" id="{D2E644AD-B444-4203-A0F6-F64DF9D7D111}"/>
+                <a16:creationId xmlns:a16="http://schemas.microsoft.com/office/drawing/2014/main" id="{9085CC30-7490-4A0F-8AAC-5B6BC73758E0}"/>
               </a:ext>
             </a:extLst>
           </p:cNvPr>
@@ -5906,7 +5904,7 @@
           <a:p>
             <a:r>
               <a:rPr lang="en-US" dirty="0"/>
-              <a:t>Outside the classroom: internships</a:t>
+              <a:t>Summing up your work: Portfolios</a:t>
             </a:r>
           </a:p>
         </p:txBody>
@@ -5916,7 +5914,7 @@
           <p:cNvPr id="3" name="Content Placeholder 2">
             <a:extLst>
               <a:ext uri="{FF2B5EF4-FFF2-40B4-BE49-F238E27FC236}">
-                <a16:creationId xmlns:a16="http://schemas.microsoft.com/office/drawing/2014/main" id="{FF3289F0-AF6F-4D47-9E42-3AA418E25DDF}"/>
+                <a16:creationId xmlns:a16="http://schemas.microsoft.com/office/drawing/2014/main" id="{01926D69-C315-428F-A6BF-68732A1FDECB}"/>
               </a:ext>
             </a:extLst>
           </p:cNvPr>
@@ -5932,42 +5930,28 @@
           <a:bodyPr/>
           <a:lstStyle/>
           <a:p>
-            <a:pPr marL="0" indent="0">
-              <a:buNone/>
-            </a:pPr>
-            <a:r>
-              <a:rPr lang="en-US" u="sng" dirty="0"/>
-              <a:t>Getting one:</a:t>
-            </a:r>
-          </a:p>
-          <a:p>
-            <a:r>
-              <a:rPr lang="en-US" dirty="0"/>
-              <a:t>Check Handshake, talk to your advisor, practice applying</a:t>
-            </a:r>
-          </a:p>
-          <a:p>
-            <a:endParaRPr lang="en-US" dirty="0"/>
-          </a:p>
-          <a:p>
-            <a:pPr marL="0" indent="0">
-              <a:buNone/>
-            </a:pPr>
-            <a:r>
-              <a:rPr lang="en-US" u="sng" dirty="0"/>
-              <a:t>Once you have one:</a:t>
-            </a:r>
-          </a:p>
-          <a:p>
-            <a:r>
-              <a:rPr lang="en-US" dirty="0"/>
-              <a:t>Build “soft” skills, job skills, network, etc.</a:t>
-            </a:r>
-          </a:p>
-          <a:p>
-            <a:r>
-              <a:rPr lang="en-US" dirty="0"/>
-              <a:t>Try to leverage your current jobs</a:t>
+            <a:r>
+              <a:rPr lang="en-US" dirty="0"/>
+              <a:t>Work backwards: Aim to have solid work</a:t>
+            </a:r>
+            <a:br>
+              <a:rPr lang="en-US" dirty="0"/>
+            </a:br>
+            <a:r>
+              <a:rPr lang="en-US" dirty="0"/>
+              <a:t>Class projects, formal capstone, other work?</a:t>
+            </a:r>
+          </a:p>
+          <a:p>
+            <a:r>
+              <a:rPr lang="en-US" dirty="0"/>
+              <a:t>Have a way to compile it and to showcase it</a:t>
+            </a:r>
+          </a:p>
+          <a:p>
+            <a:r>
+              <a:rPr lang="en-US" dirty="0"/>
+              <a:t>Build a website?</a:t>
             </a:r>
           </a:p>
         </p:txBody>
@@ -5975,7 +5959,7 @@
     </p:spTree>
     <p:extLst>
       <p:ext uri="{BB962C8B-B14F-4D97-AF65-F5344CB8AC3E}">
-        <p14:creationId xmlns:p14="http://schemas.microsoft.com/office/powerpoint/2010/main" val="3026595291"/>
+        <p14:creationId xmlns:p14="http://schemas.microsoft.com/office/powerpoint/2010/main" val="803023614"/>
       </p:ext>
     </p:extLst>
   </p:cSld>
@@ -6025,7 +6009,7 @@
           <a:p>
             <a:r>
               <a:rPr lang="en-US" dirty="0"/>
-              <a:t>Research Opportunities</a:t>
+              <a:t>Outside the classroom: internships</a:t>
             </a:r>
           </a:p>
         </p:txBody>
@@ -6051,30 +6035,42 @@
           <a:bodyPr/>
           <a:lstStyle/>
           <a:p>
-            <a:r>
-              <a:rPr lang="en-US" dirty="0"/>
-              <a:t>Apply your content knowledge, critical thinking</a:t>
-            </a:r>
-          </a:p>
-          <a:p>
-            <a:r>
-              <a:rPr lang="en-US" dirty="0"/>
-              <a:t>Demonstrate teamwork, time management, related skills</a:t>
-            </a:r>
-          </a:p>
-          <a:p>
-            <a:r>
-              <a:rPr lang="en-US" dirty="0"/>
-              <a:t>Make a presentation, write well—build communication skills</a:t>
+            <a:pPr marL="0" indent="0">
+              <a:buNone/>
+            </a:pPr>
+            <a:r>
+              <a:rPr lang="en-US" u="sng" dirty="0"/>
+              <a:t>Getting one:</a:t>
+            </a:r>
+          </a:p>
+          <a:p>
+            <a:r>
+              <a:rPr lang="en-US" dirty="0"/>
+              <a:t>Check Handshake, talk to your advisor, practice applying</a:t>
             </a:r>
           </a:p>
           <a:p>
             <a:endParaRPr lang="en-US" dirty="0"/>
           </a:p>
           <a:p>
-            <a:r>
-              <a:rPr lang="en-US" dirty="0"/>
-              <a:t>Take advantage of SHARC funding during Summer 2026!</a:t>
+            <a:pPr marL="0" indent="0">
+              <a:buNone/>
+            </a:pPr>
+            <a:r>
+              <a:rPr lang="en-US" u="sng" dirty="0"/>
+              <a:t>Once you have one:</a:t>
+            </a:r>
+          </a:p>
+          <a:p>
+            <a:r>
+              <a:rPr lang="en-US" dirty="0"/>
+              <a:t>Build “soft” skills, job skills, network, etc.</a:t>
+            </a:r>
+          </a:p>
+          <a:p>
+            <a:r>
+              <a:rPr lang="en-US" dirty="0"/>
+              <a:t>Try to leverage your current jobs</a:t>
             </a:r>
           </a:p>
         </p:txBody>
@@ -6082,7 +6078,7 @@
     </p:spTree>
     <p:extLst>
       <p:ext uri="{BB962C8B-B14F-4D97-AF65-F5344CB8AC3E}">
-        <p14:creationId xmlns:p14="http://schemas.microsoft.com/office/powerpoint/2010/main" val="20577643"/>
+        <p14:creationId xmlns:p14="http://schemas.microsoft.com/office/powerpoint/2010/main" val="3026595291"/>
       </p:ext>
     </p:extLst>
   </p:cSld>
@@ -6132,7 +6128,7 @@
           <a:p>
             <a:r>
               <a:rPr lang="en-US" dirty="0"/>
-              <a:t>Tying it together: your resume</a:t>
+              <a:t>Research Opportunities</a:t>
             </a:r>
           </a:p>
         </p:txBody>
@@ -6160,43 +6156,36 @@
           <a:p>
             <a:r>
               <a:rPr lang="en-US" dirty="0"/>
-              <a:t>Take the opportunity to highlight these opportunities: Research projects, related coursework or majors, internships</a:t>
-            </a:r>
-          </a:p>
-          <a:p>
-            <a:r>
-              <a:rPr lang="en-US" dirty="0"/>
-              <a:t>Past job experience: Highlight what matters (even if the job isn’t related)</a:t>
-            </a:r>
-            <a:br>
-              <a:rPr lang="en-US" dirty="0"/>
-            </a:br>
-            <a:r>
-              <a:rPr lang="en-US" dirty="0"/>
-              <a:t>Did they trust you? Did you get things done?</a:t>
-            </a:r>
-          </a:p>
-          <a:p>
-            <a:r>
-              <a:rPr lang="en-US" dirty="0"/>
-              <a:t>Be very careful in general: What to include and what not to</a:t>
-            </a:r>
-          </a:p>
-          <a:p>
-            <a:r>
-              <a:rPr lang="en-US" dirty="0"/>
-              <a:t>Have someone look it over</a:t>
+              <a:t>Apply your content knowledge, critical thinking</a:t>
+            </a:r>
+          </a:p>
+          <a:p>
+            <a:r>
+              <a:rPr lang="en-US" dirty="0"/>
+              <a:t>Demonstrate teamwork, time management, related skills</a:t>
+            </a:r>
+          </a:p>
+          <a:p>
+            <a:r>
+              <a:rPr lang="en-US" dirty="0"/>
+              <a:t>Make a presentation, write well—build communication skills</a:t>
             </a:r>
           </a:p>
           <a:p>
             <a:endParaRPr lang="en-US" dirty="0"/>
+          </a:p>
+          <a:p>
+            <a:r>
+              <a:rPr lang="en-US" dirty="0"/>
+              <a:t>Take advantage of SHARC funding during Summer 2026!</a:t>
+            </a:r>
           </a:p>
         </p:txBody>
       </p:sp>
     </p:spTree>
     <p:extLst>
       <p:ext uri="{BB962C8B-B14F-4D97-AF65-F5344CB8AC3E}">
-        <p14:creationId xmlns:p14="http://schemas.microsoft.com/office/powerpoint/2010/main" val="104251401"/>
+        <p14:creationId xmlns:p14="http://schemas.microsoft.com/office/powerpoint/2010/main" val="20577643"/>
       </p:ext>
     </p:extLst>
   </p:cSld>
@@ -6246,7 +6235,7 @@
           <a:p>
             <a:r>
               <a:rPr lang="en-US" dirty="0"/>
-              <a:t>Achieving your goals</a:t>
+              <a:t>Tying it together: your resume</a:t>
             </a:r>
           </a:p>
         </p:txBody>
@@ -6274,6 +6263,120 @@
           <a:p>
             <a:r>
               <a:rPr lang="en-US" dirty="0"/>
+              <a:t>Take the opportunity to highlight these opportunities: Research projects, related coursework or majors, internships</a:t>
+            </a:r>
+          </a:p>
+          <a:p>
+            <a:r>
+              <a:rPr lang="en-US" dirty="0"/>
+              <a:t>Past job experience: Highlight what matters (even if the job isn’t related)</a:t>
+            </a:r>
+            <a:br>
+              <a:rPr lang="en-US" dirty="0"/>
+            </a:br>
+            <a:r>
+              <a:rPr lang="en-US" dirty="0"/>
+              <a:t>Did they trust you? Did you get things done?</a:t>
+            </a:r>
+          </a:p>
+          <a:p>
+            <a:r>
+              <a:rPr lang="en-US" dirty="0"/>
+              <a:t>Be very careful in general: What to include and what not to</a:t>
+            </a:r>
+          </a:p>
+          <a:p>
+            <a:r>
+              <a:rPr lang="en-US" dirty="0"/>
+              <a:t>Have someone look it over</a:t>
+            </a:r>
+          </a:p>
+          <a:p>
+            <a:endParaRPr lang="en-US" dirty="0"/>
+          </a:p>
+        </p:txBody>
+      </p:sp>
+    </p:spTree>
+    <p:extLst>
+      <p:ext uri="{BB962C8B-B14F-4D97-AF65-F5344CB8AC3E}">
+        <p14:creationId xmlns:p14="http://schemas.microsoft.com/office/powerpoint/2010/main" val="104251401"/>
+      </p:ext>
+    </p:extLst>
+  </p:cSld>
+  <p:clrMapOvr>
+    <a:masterClrMapping/>
+  </p:clrMapOvr>
+</p:sld>
+</file>
+
+<file path=ppt/slides/slide15.xml><?xml version="1.0" encoding="utf-8"?>
+<p:sld xmlns:a="http://schemas.openxmlformats.org/drawingml/2006/main" xmlns:r="http://schemas.openxmlformats.org/officeDocument/2006/relationships" xmlns:p="http://schemas.openxmlformats.org/presentationml/2006/main">
+  <p:cSld>
+    <p:spTree>
+      <p:nvGrpSpPr>
+        <p:cNvPr id="1" name=""/>
+        <p:cNvGrpSpPr/>
+        <p:nvPr/>
+      </p:nvGrpSpPr>
+      <p:grpSpPr>
+        <a:xfrm>
+          <a:off x="0" y="0"/>
+          <a:ext cx="0" cy="0"/>
+          <a:chOff x="0" y="0"/>
+          <a:chExt cx="0" cy="0"/>
+        </a:xfrm>
+      </p:grpSpPr>
+      <p:sp>
+        <p:nvSpPr>
+          <p:cNvPr id="2" name="Title 1">
+            <a:extLst>
+              <a:ext uri="{FF2B5EF4-FFF2-40B4-BE49-F238E27FC236}">
+                <a16:creationId xmlns:a16="http://schemas.microsoft.com/office/drawing/2014/main" id="{D2E644AD-B444-4203-A0F6-F64DF9D7D111}"/>
+              </a:ext>
+            </a:extLst>
+          </p:cNvPr>
+          <p:cNvSpPr>
+            <a:spLocks noGrp="1"/>
+          </p:cNvSpPr>
+          <p:nvPr>
+            <p:ph type="title"/>
+          </p:nvPr>
+        </p:nvSpPr>
+        <p:spPr/>
+        <p:txBody>
+          <a:bodyPr/>
+          <a:lstStyle/>
+          <a:p>
+            <a:r>
+              <a:rPr lang="en-US" dirty="0"/>
+              <a:t>Achieving your goals</a:t>
+            </a:r>
+          </a:p>
+        </p:txBody>
+      </p:sp>
+      <p:sp>
+        <p:nvSpPr>
+          <p:cNvPr id="3" name="Content Placeholder 2">
+            <a:extLst>
+              <a:ext uri="{FF2B5EF4-FFF2-40B4-BE49-F238E27FC236}">
+                <a16:creationId xmlns:a16="http://schemas.microsoft.com/office/drawing/2014/main" id="{FF3289F0-AF6F-4D47-9E42-3AA418E25DDF}"/>
+              </a:ext>
+            </a:extLst>
+          </p:cNvPr>
+          <p:cNvSpPr>
+            <a:spLocks noGrp="1"/>
+          </p:cNvSpPr>
+          <p:nvPr>
+            <p:ph idx="1"/>
+          </p:nvPr>
+        </p:nvSpPr>
+        <p:spPr/>
+        <p:txBody>
+          <a:bodyPr/>
+          <a:lstStyle/>
+          <a:p>
+            <a:r>
+              <a:rPr lang="en-US" dirty="0"/>
               <a:t>You have the skills to do what you want</a:t>
             </a:r>
           </a:p>
@@ -6294,13 +6397,34 @@
           </a:p>
           <a:p>
             <a:r>
-              <a:rPr lang="en-US"/>
-              <a:t>Any questions</a:t>
-            </a:r>
-            <a:r>
-              <a:rPr lang="en-US" dirty="0"/>
-              <a:t>?</a:t>
-            </a:r>
+              <a:rPr lang="en-US" dirty="0"/>
+              <a:t>Any questions?</a:t>
+            </a:r>
+          </a:p>
+          <a:p>
+            <a:r>
+              <a:rPr lang="en-US" dirty="0">
+                <a:hlinkClick r:id="rId2"/>
+              </a:rPr>
+              <a:t>www.neiu.edu/sharc</a:t>
+            </a:r>
+            <a:r>
+              <a:rPr lang="en-US" dirty="0"/>
+              <a:t>   OR @</a:t>
+            </a:r>
+            <a:r>
+              <a:rPr lang="en-US" dirty="0" err="1"/>
+              <a:t>neiu_sharc</a:t>
+            </a:r>
+            <a:r>
+              <a:rPr lang="en-US" dirty="0"/>
+              <a:t> </a:t>
+            </a:r>
+            <a:r>
+              <a:rPr lang="en-US"/>
+              <a:t>on Instagram</a:t>
+            </a:r>
+            <a:endParaRPr lang="en-US" dirty="0"/>
           </a:p>
           <a:p>
             <a:endParaRPr lang="en-US" dirty="0"/>
@@ -6355,12 +6479,14 @@
         </p:nvSpPr>
         <p:spPr/>
         <p:txBody>
-          <a:bodyPr/>
-          <a:lstStyle/>
-          <a:p>
-            <a:r>
-              <a:rPr lang="en-US" dirty="0"/>
-              <a:t>Achieving your career goals!</a:t>
+          <a:bodyPr>
+            <a:normAutofit/>
+          </a:bodyPr>
+          <a:lstStyle/>
+          <a:p>
+            <a:r>
+              <a:rPr lang="en-US" sz="3000" dirty="0"/>
+              <a:t>What do you want your first job to be?</a:t>
             </a:r>
           </a:p>
         </p:txBody>
@@ -6388,28 +6514,19 @@
           <a:p>
             <a:r>
               <a:rPr lang="en-US" dirty="0"/>
-              <a:t>Social Sciences and Humanities: Interesting topics + Interesting careers</a:t>
-            </a:r>
-          </a:p>
-          <a:p>
-            <a:r>
-              <a:rPr lang="en-US" dirty="0"/>
-              <a:t>BUT: The major is only about 1/3 of your total credits</a:t>
-            </a:r>
-          </a:p>
-          <a:p>
-            <a:r>
-              <a:rPr lang="en-US" dirty="0"/>
-              <a:t>AND: There is more to college than just credits</a:t>
-            </a:r>
-          </a:p>
-          <a:p>
-            <a:endParaRPr lang="en-US" dirty="0"/>
-          </a:p>
-          <a:p>
-            <a:r>
-              <a:rPr lang="en-US" dirty="0"/>
-              <a:t>How can you make the most of these opportunities?</a:t>
+              <a:t>Work backwards</a:t>
+            </a:r>
+          </a:p>
+          <a:p>
+            <a:r>
+              <a:rPr lang="en-US" dirty="0"/>
+              <a:t>Start working forwards…now!</a:t>
+            </a:r>
+          </a:p>
+          <a:p>
+            <a:r>
+              <a:rPr lang="en-US" dirty="0"/>
+              <a:t>What will you be glad you did?</a:t>
             </a:r>
           </a:p>
         </p:txBody>
@@ -6467,7 +6584,7 @@
           <a:p>
             <a:r>
               <a:rPr lang="en-US" dirty="0"/>
-              <a:t>What can you do?</a:t>
+              <a:t>Achieving your career goals!</a:t>
             </a:r>
           </a:p>
         </p:txBody>
@@ -6495,19 +6612,19 @@
           <a:p>
             <a:r>
               <a:rPr lang="en-US" dirty="0"/>
-              <a:t>Leverage General Education courses</a:t>
-            </a:r>
-          </a:p>
-          <a:p>
-            <a:r>
-              <a:rPr lang="en-US" dirty="0"/>
-              <a:t>Take advantage of 300-level electives</a:t>
-            </a:r>
-          </a:p>
-          <a:p>
-            <a:r>
-              <a:rPr lang="en-US" dirty="0"/>
-              <a:t>Go outside the classroom</a:t>
+              <a:t>Social Sciences and Humanities: Interesting topics + Interesting careers</a:t>
+            </a:r>
+          </a:p>
+          <a:p>
+            <a:r>
+              <a:rPr lang="en-US" dirty="0"/>
+              <a:t>BUT: The major is only about 1/3 of your total credits</a:t>
+            </a:r>
+          </a:p>
+          <a:p>
+            <a:r>
+              <a:rPr lang="en-US" dirty="0"/>
+              <a:t>AND: There is more to college than just credits</a:t>
             </a:r>
           </a:p>
           <a:p>
@@ -6516,13 +6633,7 @@
           <a:p>
             <a:r>
               <a:rPr lang="en-US" dirty="0"/>
-              <a:t>(All while building skills within your major!)</a:t>
-            </a:r>
-          </a:p>
-          <a:p>
-            <a:r>
-              <a:rPr lang="en-US" dirty="0"/>
-              <a:t>Think of some key ideas and make a plan</a:t>
+              <a:t>How can you make the most of these opportunities?</a:t>
             </a:r>
           </a:p>
         </p:txBody>
@@ -6530,7 +6641,7 @@
     </p:spTree>
     <p:extLst>
       <p:ext uri="{BB962C8B-B14F-4D97-AF65-F5344CB8AC3E}">
-        <p14:creationId xmlns:p14="http://schemas.microsoft.com/office/powerpoint/2010/main" val="2544355166"/>
+        <p14:creationId xmlns:p14="http://schemas.microsoft.com/office/powerpoint/2010/main" val="3750805327"/>
       </p:ext>
     </p:extLst>
   </p:cSld>
@@ -6580,7 +6691,7 @@
           <a:p>
             <a:r>
               <a:rPr lang="en-US" dirty="0"/>
-              <a:t>How to do it?</a:t>
+              <a:t>What can you do?</a:t>
             </a:r>
           </a:p>
         </p:txBody>
@@ -6608,56 +6719,42 @@
           <a:p>
             <a:r>
               <a:rPr lang="en-US" dirty="0"/>
-              <a:t>Work backward from a goal:  Specific career, grad school, how you see yourself</a:t>
-            </a:r>
-            <a:br>
-              <a:rPr lang="en-US" dirty="0"/>
-            </a:br>
-            <a:r>
-              <a:rPr lang="en-US" dirty="0"/>
-              <a:t>What will you need?</a:t>
-            </a:r>
-          </a:p>
-          <a:p>
-            <a:r>
-              <a:rPr lang="en-US" dirty="0"/>
-              <a:t>Work NOW to do it</a:t>
-            </a:r>
-          </a:p>
-          <a:p>
-            <a:r>
-              <a:rPr lang="en-US" dirty="0"/>
-              <a:t>Choose courses with the goal in mind</a:t>
-            </a:r>
-          </a:p>
-          <a:p>
-            <a:r>
-              <a:rPr lang="en-US" dirty="0"/>
-              <a:t>Take part in activities outside the classroom:</a:t>
-            </a:r>
-            <a:br>
-              <a:rPr lang="en-US" dirty="0"/>
-            </a:br>
-            <a:r>
-              <a:rPr lang="en-US" dirty="0"/>
-              <a:t>Organizations; internships; research opportunities; presentations</a:t>
-            </a:r>
-          </a:p>
-          <a:p>
-            <a:r>
-              <a:rPr lang="en-US" dirty="0"/>
-              <a:t>Present yourself: A portfolio and your resume</a:t>
+              <a:t>Leverage General Education courses</a:t>
+            </a:r>
+          </a:p>
+          <a:p>
+            <a:r>
+              <a:rPr lang="en-US" dirty="0"/>
+              <a:t>Take advantage of 300-level electives</a:t>
+            </a:r>
+          </a:p>
+          <a:p>
+            <a:r>
+              <a:rPr lang="en-US" dirty="0"/>
+              <a:t>Go outside the classroom</a:t>
             </a:r>
           </a:p>
           <a:p>
             <a:endParaRPr lang="en-US" dirty="0"/>
+          </a:p>
+          <a:p>
+            <a:r>
+              <a:rPr lang="en-US" dirty="0"/>
+              <a:t>(All while building skills within your major!)</a:t>
+            </a:r>
+          </a:p>
+          <a:p>
+            <a:r>
+              <a:rPr lang="en-US" dirty="0"/>
+              <a:t>Think of some key ideas and make a plan</a:t>
+            </a:r>
           </a:p>
         </p:txBody>
       </p:sp>
     </p:spTree>
     <p:extLst>
       <p:ext uri="{BB962C8B-B14F-4D97-AF65-F5344CB8AC3E}">
-        <p14:creationId xmlns:p14="http://schemas.microsoft.com/office/powerpoint/2010/main" val="3364375919"/>
+        <p14:creationId xmlns:p14="http://schemas.microsoft.com/office/powerpoint/2010/main" val="2544355166"/>
       </p:ext>
     </p:extLst>
   </p:cSld>
@@ -6707,7 +6804,7 @@
           <a:p>
             <a:r>
               <a:rPr lang="en-US" dirty="0"/>
-              <a:t>Differences in Majors</a:t>
+              <a:t>How to do it?</a:t>
             </a:r>
           </a:p>
         </p:txBody>
@@ -6730,68 +6827,61 @@
         </p:nvSpPr>
         <p:spPr/>
         <p:txBody>
-          <a:bodyPr>
-            <a:normAutofit lnSpcReduction="10000"/>
-          </a:bodyPr>
-          <a:lstStyle/>
-          <a:p>
-            <a:pPr marL="0" indent="0">
-              <a:buNone/>
-            </a:pPr>
-            <a:r>
-              <a:rPr lang="en-US" u="sng" dirty="0"/>
-              <a:t>Outcomes</a:t>
-            </a:r>
-          </a:p>
-          <a:p>
-            <a:r>
-              <a:rPr lang="en-US" dirty="0"/>
-              <a:t>Some build specific skills (like Economics)</a:t>
-            </a:r>
-          </a:p>
-          <a:p>
-            <a:r>
-              <a:rPr lang="en-US" dirty="0"/>
-              <a:t>Others have skills components (such as GIS within Geography)</a:t>
-            </a:r>
-          </a:p>
-          <a:p>
-            <a:r>
-              <a:rPr lang="en-US" dirty="0"/>
-              <a:t>Econ majors could use a writing class; Journalism majors could use an Econ class?</a:t>
+          <a:bodyPr/>
+          <a:lstStyle/>
+          <a:p>
+            <a:r>
+              <a:rPr lang="en-US" dirty="0"/>
+              <a:t>Work backward from a goal:  Specific career, grad school, how you see yourself</a:t>
+            </a:r>
+            <a:br>
+              <a:rPr lang="en-US" dirty="0"/>
+            </a:br>
+            <a:r>
+              <a:rPr lang="en-US" dirty="0"/>
+              <a:t>What will you need?</a:t>
+            </a:r>
+          </a:p>
+          <a:p>
+            <a:r>
+              <a:rPr lang="en-US" dirty="0"/>
+              <a:t>Work NOW to do it</a:t>
+            </a:r>
+          </a:p>
+          <a:p>
+            <a:r>
+              <a:rPr lang="en-US" dirty="0"/>
+              <a:t>Choose courses with the goal in mind</a:t>
+            </a:r>
+          </a:p>
+          <a:p>
+            <a:r>
+              <a:rPr lang="en-US" dirty="0"/>
+              <a:t>Take part in activities outside the classroom:</a:t>
+            </a:r>
+            <a:br>
+              <a:rPr lang="en-US" dirty="0"/>
+            </a:br>
+            <a:r>
+              <a:rPr lang="en-US" dirty="0"/>
+              <a:t>Organizations; internships; research opportunities; presentations</a:t>
+            </a:r>
+          </a:p>
+          <a:p>
+            <a:r>
+              <a:rPr lang="en-US" dirty="0"/>
+              <a:t>Present yourself: A portfolio and your resume</a:t>
             </a:r>
           </a:p>
           <a:p>
             <a:endParaRPr lang="en-US" dirty="0"/>
-          </a:p>
-          <a:p>
-            <a:pPr marL="0" indent="0">
-              <a:buNone/>
-            </a:pPr>
-            <a:r>
-              <a:rPr lang="en-US" u="sng" dirty="0"/>
-              <a:t>Opportunities</a:t>
-            </a:r>
-          </a:p>
-          <a:p>
-            <a:r>
-              <a:rPr lang="en-US" dirty="0"/>
-              <a:t>Majors have different requirements, so the numbers can be different</a:t>
-            </a:r>
-            <a:br>
-              <a:rPr lang="en-US" dirty="0"/>
-            </a:br>
-            <a:r>
-              <a:rPr lang="en-US" dirty="0"/>
-              <a:t>(Econ requires 24 credits at the 300 level, so there can be 16 “elective” credits)</a:t>
-            </a:r>
           </a:p>
         </p:txBody>
       </p:sp>
     </p:spTree>
     <p:extLst>
       <p:ext uri="{BB962C8B-B14F-4D97-AF65-F5344CB8AC3E}">
-        <p14:creationId xmlns:p14="http://schemas.microsoft.com/office/powerpoint/2010/main" val="294776552"/>
+        <p14:creationId xmlns:p14="http://schemas.microsoft.com/office/powerpoint/2010/main" val="3364375919"/>
       </p:ext>
     </p:extLst>
   </p:cSld>
@@ -6841,7 +6931,7 @@
           <a:p>
             <a:r>
               <a:rPr lang="en-US" dirty="0"/>
-              <a:t>Skills vs. signals</a:t>
+              <a:t>Differences in Majors</a:t>
             </a:r>
           </a:p>
         </p:txBody>
@@ -6864,50 +6954,68 @@
         </p:nvSpPr>
         <p:spPr/>
         <p:txBody>
-          <a:bodyPr/>
-          <a:lstStyle/>
-          <a:p>
-            <a:r>
-              <a:rPr lang="en-US" dirty="0"/>
-              <a:t>You can learn something directly employable: Writing, Data analysis, Business skills </a:t>
+          <a:bodyPr>
+            <a:normAutofit lnSpcReduction="10000"/>
+          </a:bodyPr>
+          <a:lstStyle/>
+          <a:p>
+            <a:pPr marL="0" indent="0">
+              <a:buNone/>
+            </a:pPr>
+            <a:r>
+              <a:rPr lang="en-US" u="sng" dirty="0"/>
+              <a:t>Outcomes</a:t>
+            </a:r>
+          </a:p>
+          <a:p>
+            <a:r>
+              <a:rPr lang="en-US" dirty="0"/>
+              <a:t>Some build specific skills (like Economics)</a:t>
+            </a:r>
+          </a:p>
+          <a:p>
+            <a:r>
+              <a:rPr lang="en-US" dirty="0"/>
+              <a:t>Others have skills components (such as GIS within Geography)</a:t>
+            </a:r>
+          </a:p>
+          <a:p>
+            <a:r>
+              <a:rPr lang="en-US" dirty="0"/>
+              <a:t>Econ majors could use a writing class; Journalism majors could use an Econ class?</a:t>
             </a:r>
           </a:p>
           <a:p>
             <a:endParaRPr lang="en-US" dirty="0"/>
           </a:p>
           <a:p>
-            <a:r>
-              <a:rPr lang="en-US" dirty="0"/>
-              <a:t>You can show employers that you are competent, trustworthy, or interested</a:t>
-            </a:r>
-          </a:p>
-          <a:p>
-            <a:r>
-              <a:rPr lang="en-US" dirty="0"/>
-              <a:t>“Signaling” in Economics: You can cut through the noise</a:t>
-            </a:r>
-          </a:p>
-          <a:p>
-            <a:endParaRPr lang="en-US" dirty="0"/>
-          </a:p>
-          <a:p>
-            <a:r>
-              <a:rPr lang="en-US" dirty="0"/>
-              <a:t>Combined: You can get the interview and get the job</a:t>
-            </a:r>
-          </a:p>
-          <a:p>
-            <a:endParaRPr lang="en-US" dirty="0"/>
-          </a:p>
-          <a:p>
-            <a:endParaRPr lang="en-US" dirty="0"/>
+            <a:pPr marL="0" indent="0">
+              <a:buNone/>
+            </a:pPr>
+            <a:r>
+              <a:rPr lang="en-US" u="sng" dirty="0"/>
+              <a:t>Opportunities</a:t>
+            </a:r>
+          </a:p>
+          <a:p>
+            <a:r>
+              <a:rPr lang="en-US" dirty="0"/>
+              <a:t>Majors have different requirements, so the numbers can be different</a:t>
+            </a:r>
+            <a:br>
+              <a:rPr lang="en-US" dirty="0"/>
+            </a:br>
+            <a:r>
+              <a:rPr lang="en-US" dirty="0"/>
+              <a:t>(Econ requires 24 credits at the 300 level, so there can be 16 “elective” credits)</a:t>
+            </a:r>
           </a:p>
         </p:txBody>
       </p:sp>
     </p:spTree>
     <p:extLst>
       <p:ext uri="{BB962C8B-B14F-4D97-AF65-F5344CB8AC3E}">
-        <p14:creationId xmlns:p14="http://schemas.microsoft.com/office/powerpoint/2010/main" val="2598301172"/>
+        <p14:creationId xmlns:p14="http://schemas.microsoft.com/office/powerpoint/2010/main" val="294776552"/>
       </p:ext>
     </p:extLst>
   </p:cSld>
@@ -6939,7 +7047,7 @@
           <p:cNvPr id="2" name="Title 1">
             <a:extLst>
               <a:ext uri="{FF2B5EF4-FFF2-40B4-BE49-F238E27FC236}">
-                <a16:creationId xmlns:a16="http://schemas.microsoft.com/office/drawing/2014/main" id="{A2FFA0D1-BCEB-4ACA-BB8D-95E3D3E2B8CE}"/>
+                <a16:creationId xmlns:a16="http://schemas.microsoft.com/office/drawing/2014/main" id="{104104F1-1866-4F7D-ABCC-7C520B853958}"/>
               </a:ext>
             </a:extLst>
           </p:cNvPr>
@@ -6957,7 +7065,7 @@
           <a:p>
             <a:r>
               <a:rPr lang="en-US" dirty="0"/>
-              <a:t>Substitutes and Complements</a:t>
+              <a:t>Skills vs. signals</a:t>
             </a:r>
           </a:p>
         </p:txBody>
@@ -6967,7 +7075,7 @@
           <p:cNvPr id="3" name="Content Placeholder 2">
             <a:extLst>
               <a:ext uri="{FF2B5EF4-FFF2-40B4-BE49-F238E27FC236}">
-                <a16:creationId xmlns:a16="http://schemas.microsoft.com/office/drawing/2014/main" id="{4D9A0A03-C9D8-4ED1-983E-6818E1E7B53B}"/>
+                <a16:creationId xmlns:a16="http://schemas.microsoft.com/office/drawing/2014/main" id="{54512400-E6C1-4708-81C0-007BC3B955F8}"/>
               </a:ext>
             </a:extLst>
           </p:cNvPr>
@@ -6984,26 +7092,8 @@
           <a:lstStyle/>
           <a:p>
             <a:r>
-              <a:rPr lang="en-US" u="sng" dirty="0"/>
-              <a:t>Do you want to</a:t>
-            </a:r>
-            <a:r>
-              <a:rPr lang="en-US" dirty="0"/>
-              <a:t>:</a:t>
-            </a:r>
-            <a:br>
-              <a:rPr lang="en-US" dirty="0"/>
-            </a:br>
-            <a:r>
-              <a:rPr lang="en-US" dirty="0"/>
-              <a:t>Learn something outside your major  	OR</a:t>
-            </a:r>
-            <a:br>
-              <a:rPr lang="en-US" dirty="0"/>
-            </a:br>
-            <a:r>
-              <a:rPr lang="en-US" dirty="0"/>
-              <a:t>Do something related to augment your major</a:t>
+              <a:rPr lang="en-US" dirty="0"/>
+              <a:t>You can learn something directly employable: Writing, Data analysis, Business skills </a:t>
             </a:r>
           </a:p>
           <a:p>
@@ -7012,7 +7102,13 @@
           <a:p>
             <a:r>
               <a:rPr lang="en-US" dirty="0"/>
-              <a:t>Example: Economics &lt;--&gt;  Global Studies</a:t>
+              <a:t>You can show employers that you are competent, trustworthy, or interested</a:t>
+            </a:r>
+          </a:p>
+          <a:p>
+            <a:r>
+              <a:rPr lang="en-US" dirty="0"/>
+              <a:t>“Signaling” in Economics: You can cut through the noise</a:t>
             </a:r>
           </a:p>
           <a:p>
@@ -7021,15 +7117,21 @@
           <a:p>
             <a:r>
               <a:rPr lang="en-US" dirty="0"/>
-              <a:t>A little of something goes a long way!</a:t>
-            </a:r>
+              <a:t>Combined: You can get the interview and get the job</a:t>
+            </a:r>
+          </a:p>
+          <a:p>
+            <a:endParaRPr lang="en-US" dirty="0"/>
+          </a:p>
+          <a:p>
+            <a:endParaRPr lang="en-US" dirty="0"/>
           </a:p>
         </p:txBody>
       </p:sp>
     </p:spTree>
     <p:extLst>
       <p:ext uri="{BB962C8B-B14F-4D97-AF65-F5344CB8AC3E}">
-        <p14:creationId xmlns:p14="http://schemas.microsoft.com/office/powerpoint/2010/main" val="3455443030"/>
+        <p14:creationId xmlns:p14="http://schemas.microsoft.com/office/powerpoint/2010/main" val="2598301172"/>
       </p:ext>
     </p:extLst>
   </p:cSld>
@@ -7079,7 +7181,7 @@
           <a:p>
             <a:r>
               <a:rPr lang="en-US" dirty="0"/>
-              <a:t>Gen Eds and Credit gaps</a:t>
+              <a:t>Substitutes and Complements</a:t>
             </a:r>
           </a:p>
         </p:txBody>
@@ -7106,20 +7208,26 @@
           <a:lstStyle/>
           <a:p>
             <a:r>
-              <a:rPr lang="en-US" dirty="0"/>
-              <a:t>Don’t be random; have a goal in mind</a:t>
-            </a:r>
-          </a:p>
-          <a:p>
-            <a:r>
-              <a:rPr lang="en-US" dirty="0"/>
-              <a:t>Name a major: what Fine Arts/Natural Sciences/Other courses might be a good fit?</a:t>
-            </a:r>
-          </a:p>
-          <a:p>
-            <a:r>
-              <a:rPr lang="en-US" dirty="0"/>
-              <a:t>Same for ELEs: What courses might work with your degree?</a:t>
+              <a:rPr lang="en-US" u="sng" dirty="0"/>
+              <a:t>Do you want to</a:t>
+            </a:r>
+            <a:r>
+              <a:rPr lang="en-US" dirty="0"/>
+              <a:t>:</a:t>
+            </a:r>
+            <a:br>
+              <a:rPr lang="en-US" dirty="0"/>
+            </a:br>
+            <a:r>
+              <a:rPr lang="en-US" dirty="0"/>
+              <a:t>Learn something outside your major  	OR</a:t>
+            </a:r>
+            <a:br>
+              <a:rPr lang="en-US" dirty="0"/>
+            </a:br>
+            <a:r>
+              <a:rPr lang="en-US" dirty="0"/>
+              <a:t>Do something related to augment your major</a:t>
             </a:r>
           </a:p>
           <a:p>
@@ -7128,7 +7236,7 @@
           <a:p>
             <a:r>
               <a:rPr lang="en-US" dirty="0"/>
-              <a:t>Credit gaps: What 300-level courses outside your discipline might help?</a:t>
+              <a:t>Example: Economics &lt;--&gt;  Global Studies</a:t>
             </a:r>
           </a:p>
           <a:p>
@@ -7137,7 +7245,7 @@
           <a:p>
             <a:r>
               <a:rPr lang="en-US" dirty="0"/>
-              <a:t>Can you make a theme or a narrative out of this?</a:t>
+              <a:t>A little of something goes a long way!</a:t>
             </a:r>
           </a:p>
         </p:txBody>
@@ -7145,7 +7253,7 @@
     </p:spTree>
     <p:extLst>
       <p:ext uri="{BB962C8B-B14F-4D97-AF65-F5344CB8AC3E}">
-        <p14:creationId xmlns:p14="http://schemas.microsoft.com/office/powerpoint/2010/main" val="2261536140"/>
+        <p14:creationId xmlns:p14="http://schemas.microsoft.com/office/powerpoint/2010/main" val="3455443030"/>
       </p:ext>
     </p:extLst>
   </p:cSld>
@@ -7195,7 +7303,7 @@
           <a:p>
             <a:r>
               <a:rPr lang="en-US" dirty="0"/>
-              <a:t>More formal approaches</a:t>
+              <a:t>Gen Eds and Credit gaps</a:t>
             </a:r>
           </a:p>
         </p:txBody>
@@ -7223,23 +7331,37 @@
           <a:p>
             <a:r>
               <a:rPr lang="en-US" dirty="0"/>
-              <a:t>Themed groupings (unofficial, up to you to explain)</a:t>
-            </a:r>
-          </a:p>
-          <a:p>
-            <a:r>
-              <a:rPr lang="en-US" dirty="0" err="1"/>
-              <a:t>Microcredentials</a:t>
-            </a:r>
-            <a:r>
-              <a:rPr lang="en-US" dirty="0"/>
-              <a:t> (a growing trend-will be official on transcripts)</a:t>
-            </a:r>
-          </a:p>
-          <a:p>
-            <a:r>
-              <a:rPr lang="en-US" dirty="0"/>
-              <a:t>Minors (official designations; on transcripts; build skills and send signals)</a:t>
+              <a:t>Don’t be random; have a goal in mind</a:t>
+            </a:r>
+          </a:p>
+          <a:p>
+            <a:r>
+              <a:rPr lang="en-US" dirty="0"/>
+              <a:t>Name a major: what Fine Arts/Natural Sciences/Other courses might be a good fit?</a:t>
+            </a:r>
+          </a:p>
+          <a:p>
+            <a:r>
+              <a:rPr lang="en-US" dirty="0"/>
+              <a:t>Same for ELEs: What courses might work with your degree?</a:t>
+            </a:r>
+          </a:p>
+          <a:p>
+            <a:endParaRPr lang="en-US" dirty="0"/>
+          </a:p>
+          <a:p>
+            <a:r>
+              <a:rPr lang="en-US" dirty="0"/>
+              <a:t>Credit gaps: What 300-level courses outside your discipline might help?</a:t>
+            </a:r>
+          </a:p>
+          <a:p>
+            <a:endParaRPr lang="en-US" dirty="0"/>
+          </a:p>
+          <a:p>
+            <a:r>
+              <a:rPr lang="en-US" dirty="0"/>
+              <a:t>Can you make a theme or a narrative out of this?</a:t>
             </a:r>
           </a:p>
         </p:txBody>
@@ -7247,7 +7369,7 @@
     </p:spTree>
     <p:extLst>
       <p:ext uri="{BB962C8B-B14F-4D97-AF65-F5344CB8AC3E}">
-        <p14:creationId xmlns:p14="http://schemas.microsoft.com/office/powerpoint/2010/main" val="1361017024"/>
+        <p14:creationId xmlns:p14="http://schemas.microsoft.com/office/powerpoint/2010/main" val="2261536140"/>
       </p:ext>
     </p:extLst>
   </p:cSld>
